--- a/CalendarioAgo26/presentaciones/8_Strings.pptx
+++ b/CalendarioAgo26/presentaciones/8_Strings.pptx
@@ -142,6 +142,43 @@
 </p:presentation>
 </file>
 
+<file path=ppt/revisionInfo.xml><?xml version="1.0" encoding="utf-8"?>
+<p1510:revInfo xmlns:a="http://schemas.openxmlformats.org/drawingml/2006/main" xmlns:r="http://schemas.openxmlformats.org/officeDocument/2006/relationships" xmlns:p1510="http://schemas.microsoft.com/office/powerpoint/2015/10/main">
+  <p1510:revLst>
+    <p1510:client id="{A77BA630-D1C6-40A3-B49B-A99AEF209EEA}" v="1" dt="2026-08-11T16:40:35.640"/>
+  </p1510:revLst>
+</p1510:revInfo>
+</file>
+
+<file path=ppt/changesInfos/changesInfo1.xml><?xml version="1.0" encoding="utf-8"?>
+<pc:chgInfo xmlns:a="http://schemas.openxmlformats.org/drawingml/2006/main" xmlns:r="http://schemas.openxmlformats.org/officeDocument/2006/relationships" xmlns:ac="http://schemas.microsoft.com/office/drawing/2013/main/command" xmlns:pc="http://schemas.microsoft.com/office/powerpoint/2013/main/command">
+  <pc:docChgLst>
+    <pc:chgData name="Lizethe Pérez Fuertes" userId="4ae9ef87-2a7d-42f8-8dfa-0a501a9e2ff4" providerId="ADAL" clId="{FDDD45CB-1330-4033-A842-3D2746AFF7C7}"/>
+    <pc:docChg chg="modSld">
+      <pc:chgData name="Lizethe Pérez Fuertes" userId="4ae9ef87-2a7d-42f8-8dfa-0a501a9e2ff4" providerId="ADAL" clId="{FDDD45CB-1330-4033-A842-3D2746AFF7C7}" dt="2026-08-11T16:40:35.640" v="0"/>
+      <pc:docMkLst>
+        <pc:docMk/>
+      </pc:docMkLst>
+      <pc:sldChg chg="modSp">
+        <pc:chgData name="Lizethe Pérez Fuertes" userId="4ae9ef87-2a7d-42f8-8dfa-0a501a9e2ff4" providerId="ADAL" clId="{FDDD45CB-1330-4033-A842-3D2746AFF7C7}" dt="2026-08-11T16:40:35.640" v="0"/>
+        <pc:sldMkLst>
+          <pc:docMk/>
+          <pc:sldMk cId="1182132109" sldId="283"/>
+        </pc:sldMkLst>
+        <pc:spChg chg="mod">
+          <ac:chgData name="Lizethe Pérez Fuertes" userId="4ae9ef87-2a7d-42f8-8dfa-0a501a9e2ff4" providerId="ADAL" clId="{FDDD45CB-1330-4033-A842-3D2746AFF7C7}" dt="2026-08-11T16:40:35.640" v="0"/>
+          <ac:spMkLst>
+            <pc:docMk/>
+            <pc:sldMk cId="1182132109" sldId="283"/>
+            <ac:spMk id="6" creationId="{29F414F1-9B12-4E69-9FCF-158B78F85A7C}"/>
+          </ac:spMkLst>
+        </pc:spChg>
+      </pc:sldChg>
+    </pc:docChg>
+  </pc:docChgLst>
+</pc:chgInfo>
+</file>
+
 <file path=ppt/notesMasters/notesMaster1.xml><?xml version="1.0" encoding="utf-8"?>
 <p:notesMaster xmlns:a="http://schemas.openxmlformats.org/drawingml/2006/main" xmlns:r="http://schemas.openxmlformats.org/officeDocument/2006/relationships" xmlns:p="http://schemas.openxmlformats.org/presentationml/2006/main">
   <p:cSld>
@@ -224,7 +261,7 @@
           <a:p>
             <a:fld id="{55C7BC42-2F9C-4966-894F-B6FA6F3C1DB8}" type="datetimeFigureOut">
               <a:rPr lang="es-MX" smtClean="0"/>
-              <a:t>27/02/2025</a:t>
+              <a:t>11/08/2026</a:t>
             </a:fld>
             <a:endParaRPr lang="es-MX" dirty="0"/>
           </a:p>
@@ -383,7 +420,7 @@
           <a:p>
             <a:fld id="{22F32190-7968-4437-BE88-4F1E072F1C89}" type="slidenum">
               <a:rPr lang="es-MX" smtClean="0"/>
-              <a:t>‹#›</a:t>
+              <a:t>‹Nº›</a:t>
             </a:fld>
             <a:endParaRPr lang="es-MX" dirty="0"/>
           </a:p>
@@ -841,7 +878,7 @@
           <a:p>
             <a:fld id="{47016A6E-E1CA-4694-BCEE-11D49EEFA04C}" type="datetimeFigureOut">
               <a:rPr lang="es-MX" smtClean="0"/>
-              <a:t>27/02/2025</a:t>
+              <a:t>11/08/2026</a:t>
             </a:fld>
             <a:endParaRPr lang="es-MX" dirty="0"/>
           </a:p>
@@ -883,7 +920,7 @@
           <a:p>
             <a:fld id="{A3EDD56B-262A-460B-B003-97EE50A0783D}" type="slidenum">
               <a:rPr lang="es-MX" smtClean="0"/>
-              <a:t>‹#›</a:t>
+              <a:t>‹Nº›</a:t>
             </a:fld>
             <a:endParaRPr lang="es-MX" dirty="0"/>
           </a:p>
@@ -1011,7 +1048,7 @@
           <a:p>
             <a:fld id="{47016A6E-E1CA-4694-BCEE-11D49EEFA04C}" type="datetimeFigureOut">
               <a:rPr lang="es-MX" smtClean="0"/>
-              <a:t>27/02/2025</a:t>
+              <a:t>11/08/2026</a:t>
             </a:fld>
             <a:endParaRPr lang="es-MX" dirty="0"/>
           </a:p>
@@ -1053,7 +1090,7 @@
           <a:p>
             <a:fld id="{A3EDD56B-262A-460B-B003-97EE50A0783D}" type="slidenum">
               <a:rPr lang="es-MX" smtClean="0"/>
-              <a:t>‹#›</a:t>
+              <a:t>‹Nº›</a:t>
             </a:fld>
             <a:endParaRPr lang="es-MX" dirty="0"/>
           </a:p>
@@ -1191,7 +1228,7 @@
           <a:p>
             <a:fld id="{47016A6E-E1CA-4694-BCEE-11D49EEFA04C}" type="datetimeFigureOut">
               <a:rPr lang="es-MX" smtClean="0"/>
-              <a:t>27/02/2025</a:t>
+              <a:t>11/08/2026</a:t>
             </a:fld>
             <a:endParaRPr lang="es-MX" dirty="0"/>
           </a:p>
@@ -1233,7 +1270,7 @@
           <a:p>
             <a:fld id="{A3EDD56B-262A-460B-B003-97EE50A0783D}" type="slidenum">
               <a:rPr lang="es-MX" smtClean="0"/>
-              <a:t>‹#›</a:t>
+              <a:t>‹Nº›</a:t>
             </a:fld>
             <a:endParaRPr lang="es-MX" dirty="0"/>
           </a:p>
@@ -1344,7 +1381,7 @@
           <a:p>
             <a:fld id="{1D8BD707-D9CF-40AE-B4C6-C98DA3205C09}" type="datetimeFigureOut">
               <a:rPr lang="en-US" smtClean="0"/>
-              <a:t>2/27/2025</a:t>
+              <a:t>8/11/2026</a:t>
             </a:fld>
             <a:endParaRPr lang="en-US"/>
           </a:p>
@@ -1374,7 +1411,7 @@
                 <a:cs typeface="Calibri"/>
               </a:rPr>
               <a:pPr marL="25400"/>
-              <a:t>‹#›</a:t>
+              <a:t>‹Nº›</a:t>
             </a:fld>
             <a:endParaRPr lang="es-MX">
               <a:cs typeface="Calibri"/>
@@ -1504,7 +1541,7 @@
           <a:p>
             <a:fld id="{47016A6E-E1CA-4694-BCEE-11D49EEFA04C}" type="datetimeFigureOut">
               <a:rPr lang="es-MX" smtClean="0"/>
-              <a:t>27/02/2025</a:t>
+              <a:t>11/08/2026</a:t>
             </a:fld>
             <a:endParaRPr lang="es-MX" dirty="0"/>
           </a:p>
@@ -1546,7 +1583,7 @@
           <a:p>
             <a:fld id="{A3EDD56B-262A-460B-B003-97EE50A0783D}" type="slidenum">
               <a:rPr lang="es-MX" smtClean="0"/>
-              <a:t>‹#›</a:t>
+              <a:t>‹Nº›</a:t>
             </a:fld>
             <a:endParaRPr lang="es-MX" dirty="0"/>
           </a:p>
@@ -1750,7 +1787,7 @@
           <a:p>
             <a:fld id="{47016A6E-E1CA-4694-BCEE-11D49EEFA04C}" type="datetimeFigureOut">
               <a:rPr lang="es-MX" smtClean="0"/>
-              <a:t>27/02/2025</a:t>
+              <a:t>11/08/2026</a:t>
             </a:fld>
             <a:endParaRPr lang="es-MX" dirty="0"/>
           </a:p>
@@ -1792,7 +1829,7 @@
           <a:p>
             <a:fld id="{A3EDD56B-262A-460B-B003-97EE50A0783D}" type="slidenum">
               <a:rPr lang="es-MX" smtClean="0"/>
-              <a:t>‹#›</a:t>
+              <a:t>‹Nº›</a:t>
             </a:fld>
             <a:endParaRPr lang="es-MX" dirty="0"/>
           </a:p>
@@ -2038,7 +2075,7 @@
           <a:p>
             <a:fld id="{47016A6E-E1CA-4694-BCEE-11D49EEFA04C}" type="datetimeFigureOut">
               <a:rPr lang="es-MX" smtClean="0"/>
-              <a:t>27/02/2025</a:t>
+              <a:t>11/08/2026</a:t>
             </a:fld>
             <a:endParaRPr lang="es-MX" dirty="0"/>
           </a:p>
@@ -2080,7 +2117,7 @@
           <a:p>
             <a:fld id="{A3EDD56B-262A-460B-B003-97EE50A0783D}" type="slidenum">
               <a:rPr lang="es-MX" smtClean="0"/>
-              <a:t>‹#›</a:t>
+              <a:t>‹Nº›</a:t>
             </a:fld>
             <a:endParaRPr lang="es-MX" dirty="0"/>
           </a:p>
@@ -2460,7 +2497,7 @@
           <a:p>
             <a:fld id="{47016A6E-E1CA-4694-BCEE-11D49EEFA04C}" type="datetimeFigureOut">
               <a:rPr lang="es-MX" smtClean="0"/>
-              <a:t>27/02/2025</a:t>
+              <a:t>11/08/2026</a:t>
             </a:fld>
             <a:endParaRPr lang="es-MX" dirty="0"/>
           </a:p>
@@ -2502,7 +2539,7 @@
           <a:p>
             <a:fld id="{A3EDD56B-262A-460B-B003-97EE50A0783D}" type="slidenum">
               <a:rPr lang="es-MX" smtClean="0"/>
-              <a:t>‹#›</a:t>
+              <a:t>‹Nº›</a:t>
             </a:fld>
             <a:endParaRPr lang="es-MX" dirty="0"/>
           </a:p>
@@ -2578,7 +2615,7 @@
           <a:p>
             <a:fld id="{47016A6E-E1CA-4694-BCEE-11D49EEFA04C}" type="datetimeFigureOut">
               <a:rPr lang="es-MX" smtClean="0"/>
-              <a:t>27/02/2025</a:t>
+              <a:t>11/08/2026</a:t>
             </a:fld>
             <a:endParaRPr lang="es-MX" dirty="0"/>
           </a:p>
@@ -2620,7 +2657,7 @@
           <a:p>
             <a:fld id="{A3EDD56B-262A-460B-B003-97EE50A0783D}" type="slidenum">
               <a:rPr lang="es-MX" smtClean="0"/>
-              <a:t>‹#›</a:t>
+              <a:t>‹Nº›</a:t>
             </a:fld>
             <a:endParaRPr lang="es-MX" dirty="0"/>
           </a:p>
@@ -2673,7 +2710,7 @@
           <a:p>
             <a:fld id="{47016A6E-E1CA-4694-BCEE-11D49EEFA04C}" type="datetimeFigureOut">
               <a:rPr lang="es-MX" smtClean="0"/>
-              <a:t>27/02/2025</a:t>
+              <a:t>11/08/2026</a:t>
             </a:fld>
             <a:endParaRPr lang="es-MX" dirty="0"/>
           </a:p>
@@ -2715,7 +2752,7 @@
           <a:p>
             <a:fld id="{A3EDD56B-262A-460B-B003-97EE50A0783D}" type="slidenum">
               <a:rPr lang="es-MX" smtClean="0"/>
-              <a:t>‹#›</a:t>
+              <a:t>‹Nº›</a:t>
             </a:fld>
             <a:endParaRPr lang="es-MX" dirty="0"/>
           </a:p>
@@ -2950,7 +2987,7 @@
           <a:p>
             <a:fld id="{47016A6E-E1CA-4694-BCEE-11D49EEFA04C}" type="datetimeFigureOut">
               <a:rPr lang="es-MX" smtClean="0"/>
-              <a:t>27/02/2025</a:t>
+              <a:t>11/08/2026</a:t>
             </a:fld>
             <a:endParaRPr lang="es-MX" dirty="0"/>
           </a:p>
@@ -2992,7 +3029,7 @@
           <a:p>
             <a:fld id="{A3EDD56B-262A-460B-B003-97EE50A0783D}" type="slidenum">
               <a:rPr lang="es-MX" smtClean="0"/>
-              <a:t>‹#›</a:t>
+              <a:t>‹Nº›</a:t>
             </a:fld>
             <a:endParaRPr lang="es-MX" dirty="0"/>
           </a:p>
@@ -3203,7 +3240,7 @@
           <a:p>
             <a:fld id="{47016A6E-E1CA-4694-BCEE-11D49EEFA04C}" type="datetimeFigureOut">
               <a:rPr lang="es-MX" smtClean="0"/>
-              <a:t>27/02/2025</a:t>
+              <a:t>11/08/2026</a:t>
             </a:fld>
             <a:endParaRPr lang="es-MX" dirty="0"/>
           </a:p>
@@ -3245,7 +3282,7 @@
           <a:p>
             <a:fld id="{A3EDD56B-262A-460B-B003-97EE50A0783D}" type="slidenum">
               <a:rPr lang="es-MX" smtClean="0"/>
-              <a:t>‹#›</a:t>
+              <a:t>‹Nº›</a:t>
             </a:fld>
             <a:endParaRPr lang="es-MX" dirty="0"/>
           </a:p>
@@ -3416,7 +3453,7 @@
           <a:p>
             <a:fld id="{47016A6E-E1CA-4694-BCEE-11D49EEFA04C}" type="datetimeFigureOut">
               <a:rPr lang="es-MX" smtClean="0"/>
-              <a:t>27/02/2025</a:t>
+              <a:t>11/08/2026</a:t>
             </a:fld>
             <a:endParaRPr lang="es-MX" dirty="0"/>
           </a:p>
@@ -3494,7 +3531,7 @@
           <a:p>
             <a:fld id="{A3EDD56B-262A-460B-B003-97EE50A0783D}" type="slidenum">
               <a:rPr lang="es-MX" smtClean="0"/>
-              <a:t>‹#›</a:t>
+              <a:t>‹Nº›</a:t>
             </a:fld>
             <a:endParaRPr lang="es-MX" dirty="0"/>
           </a:p>
@@ -3942,14 +3979,14 @@
               <a:defRPr/>
             </a:pPr>
             <a:r>
-              <a:rPr lang="es-MX" sz="3200" dirty="0">
+              <a:rPr lang="es-MX" sz="3200">
                 <a:solidFill>
                   <a:schemeClr val="bg2">
                     <a:lumMod val="50000"/>
                   </a:schemeClr>
                 </a:solidFill>
               </a:rPr>
-              <a:t>TC 3001 C </a:t>
+              <a:t>TI 3008 C</a:t>
             </a:r>
             <a:br>
               <a:rPr lang="es-MX" sz="3200" dirty="0">
